--- a/Presentations/AVR Live Class 4.pptx
+++ b/Presentations/AVR Live Class 4.pptx
@@ -286,401 +286,26 @@
 <file path=ppt/changesInfos/changesInfo1.xml><?xml version="1.0" encoding="utf-8"?>
 <pc:chgInfo xmlns:a="http://schemas.openxmlformats.org/drawingml/2006/main" xmlns:r="http://schemas.openxmlformats.org/officeDocument/2006/relationships" xmlns:ac="http://schemas.microsoft.com/office/drawing/2013/main/command" xmlns:pc="http://schemas.microsoft.com/office/powerpoint/2013/main/command">
   <pc:docChgLst>
-    <pc:chgData name="Sreejith Rajan" userId="ec11bca0e4bee75f" providerId="LiveId" clId="{7CA8E155-B939-49A2-B258-5F667E7F83F2}"/>
-    <pc:docChg chg="undo custSel addSld delSld modSld">
-      <pc:chgData name="Sreejith Rajan" userId="ec11bca0e4bee75f" providerId="LiveId" clId="{7CA8E155-B939-49A2-B258-5F667E7F83F2}" dt="2025-09-01T14:39:21.139" v="738"/>
+    <pc:chgData name="Sreejith Rajan" userId="ec11bca0e4bee75f" providerId="LiveId" clId="{7B4F392D-EAB3-4CE7-903E-F84869825F47}"/>
+    <pc:docChg chg="undo custSel addSld delSld modSld sldOrd">
+      <pc:chgData name="Sreejith Rajan" userId="ec11bca0e4bee75f" providerId="LiveId" clId="{7B4F392D-EAB3-4CE7-903E-F84869825F47}" dt="2026-01-27T15:17:28.447" v="854" actId="478"/>
       <pc:docMkLst>
         <pc:docMk/>
       </pc:docMkLst>
-      <pc:sldChg chg="modSp mod">
-        <pc:chgData name="Sreejith Rajan" userId="ec11bca0e4bee75f" providerId="LiveId" clId="{7CA8E155-B939-49A2-B258-5F667E7F83F2}" dt="2025-09-01T12:41:09.203" v="40" actId="20577"/>
-        <pc:sldMkLst>
-          <pc:docMk/>
-          <pc:sldMk cId="0" sldId="256"/>
-        </pc:sldMkLst>
-        <pc:spChg chg="mod">
-          <ac:chgData name="Sreejith Rajan" userId="ec11bca0e4bee75f" providerId="LiveId" clId="{7CA8E155-B939-49A2-B258-5F667E7F83F2}" dt="2025-09-01T12:41:09.203" v="40" actId="20577"/>
-          <ac:spMkLst>
-            <pc:docMk/>
-            <pc:sldMk cId="0" sldId="256"/>
-            <ac:spMk id="33" creationId="{00000000-0000-0000-0000-000000000000}"/>
-          </ac:spMkLst>
-        </pc:spChg>
-      </pc:sldChg>
-      <pc:sldChg chg="modSp mod">
-        <pc:chgData name="Sreejith Rajan" userId="ec11bca0e4bee75f" providerId="LiveId" clId="{7CA8E155-B939-49A2-B258-5F667E7F83F2}" dt="2025-09-01T12:55:08.536" v="150" actId="20577"/>
-        <pc:sldMkLst>
-          <pc:docMk/>
-          <pc:sldMk cId="0" sldId="258"/>
-        </pc:sldMkLst>
-        <pc:spChg chg="mod">
-          <ac:chgData name="Sreejith Rajan" userId="ec11bca0e4bee75f" providerId="LiveId" clId="{7CA8E155-B939-49A2-B258-5F667E7F83F2}" dt="2025-09-01T12:51:57.061" v="52" actId="20577"/>
-          <ac:spMkLst>
-            <pc:docMk/>
-            <pc:sldMk cId="0" sldId="258"/>
-            <ac:spMk id="46" creationId="{00000000-0000-0000-0000-000000000000}"/>
-          </ac:spMkLst>
-        </pc:spChg>
-        <pc:spChg chg="mod">
-          <ac:chgData name="Sreejith Rajan" userId="ec11bca0e4bee75f" providerId="LiveId" clId="{7CA8E155-B939-49A2-B258-5F667E7F83F2}" dt="2025-09-01T12:55:08.536" v="150" actId="20577"/>
-          <ac:spMkLst>
-            <pc:docMk/>
-            <pc:sldMk cId="0" sldId="258"/>
-            <ac:spMk id="47" creationId="{00000000-0000-0000-0000-000000000000}"/>
-          </ac:spMkLst>
-        </pc:spChg>
-      </pc:sldChg>
-      <pc:sldChg chg="addSp delSp modSp mod">
-        <pc:chgData name="Sreejith Rajan" userId="ec11bca0e4bee75f" providerId="LiveId" clId="{7CA8E155-B939-49A2-B258-5F667E7F83F2}" dt="2025-09-01T12:56:08.409" v="165" actId="20577"/>
-        <pc:sldMkLst>
-          <pc:docMk/>
-          <pc:sldMk cId="0" sldId="259"/>
-        </pc:sldMkLst>
-      </pc:sldChg>
-      <pc:sldChg chg="delSp modSp mod">
-        <pc:chgData name="Sreejith Rajan" userId="ec11bca0e4bee75f" providerId="LiveId" clId="{7CA8E155-B939-49A2-B258-5F667E7F83F2}" dt="2025-09-01T13:09:36.295" v="247" actId="20577"/>
-        <pc:sldMkLst>
-          <pc:docMk/>
-          <pc:sldMk cId="1389626550" sldId="267"/>
-        </pc:sldMkLst>
-      </pc:sldChg>
-      <pc:sldChg chg="delSp modSp del mod">
-        <pc:chgData name="Sreejith Rajan" userId="ec11bca0e4bee75f" providerId="LiveId" clId="{7CA8E155-B939-49A2-B258-5F667E7F83F2}" dt="2025-09-01T13:13:41.916" v="280" actId="47"/>
-        <pc:sldMkLst>
-          <pc:docMk/>
-          <pc:sldMk cId="2517281589" sldId="274"/>
-        </pc:sldMkLst>
-      </pc:sldChg>
-      <pc:sldChg chg="delSp modSp mod">
-        <pc:chgData name="Sreejith Rajan" userId="ec11bca0e4bee75f" providerId="LiveId" clId="{7CA8E155-B939-49A2-B258-5F667E7F83F2}" dt="2025-09-01T12:57:52.460" v="187" actId="207"/>
-        <pc:sldMkLst>
-          <pc:docMk/>
-          <pc:sldMk cId="280470215" sldId="281"/>
-        </pc:sldMkLst>
-      </pc:sldChg>
-      <pc:sldChg chg="addSp delSp modSp mod">
-        <pc:chgData name="Sreejith Rajan" userId="ec11bca0e4bee75f" providerId="LiveId" clId="{7CA8E155-B939-49A2-B258-5F667E7F83F2}" dt="2025-09-01T13:07:46.235" v="213" actId="20577"/>
-        <pc:sldMkLst>
-          <pc:docMk/>
-          <pc:sldMk cId="682396941" sldId="282"/>
-        </pc:sldMkLst>
-      </pc:sldChg>
-      <pc:sldChg chg="addSp delSp modSp mod">
-        <pc:chgData name="Sreejith Rajan" userId="ec11bca0e4bee75f" providerId="LiveId" clId="{7CA8E155-B939-49A2-B258-5F667E7F83F2}" dt="2025-09-01T13:13:17.314" v="272" actId="20577"/>
-        <pc:sldMkLst>
-          <pc:docMk/>
-          <pc:sldMk cId="3362503428" sldId="283"/>
-        </pc:sldMkLst>
-      </pc:sldChg>
-      <pc:sldChg chg="delSp modSp mod">
-        <pc:chgData name="Sreejith Rajan" userId="ec11bca0e4bee75f" providerId="LiveId" clId="{7CA8E155-B939-49A2-B258-5F667E7F83F2}" dt="2025-09-01T13:15:12.557" v="344" actId="20577"/>
-        <pc:sldMkLst>
-          <pc:docMk/>
-          <pc:sldMk cId="3896615428" sldId="284"/>
-        </pc:sldMkLst>
-      </pc:sldChg>
-      <pc:sldChg chg="addSp modSp add mod">
-        <pc:chgData name="Sreejith Rajan" userId="ec11bca0e4bee75f" providerId="LiveId" clId="{7CA8E155-B939-49A2-B258-5F667E7F83F2}" dt="2025-09-01T13:21:58.159" v="365" actId="1076"/>
-        <pc:sldMkLst>
-          <pc:docMk/>
-          <pc:sldMk cId="2768999598" sldId="285"/>
-        </pc:sldMkLst>
-        <pc:spChg chg="mod">
-          <ac:chgData name="Sreejith Rajan" userId="ec11bca0e4bee75f" providerId="LiveId" clId="{7CA8E155-B939-49A2-B258-5F667E7F83F2}" dt="2025-09-01T13:15:31.332" v="346" actId="6549"/>
-          <ac:spMkLst>
-            <pc:docMk/>
-            <pc:sldMk cId="2768999598" sldId="285"/>
-            <ac:spMk id="55" creationId="{6BEB0E42-D1CA-59A5-9488-2502CA7BE06C}"/>
-          </ac:spMkLst>
-        </pc:spChg>
-      </pc:sldChg>
-      <pc:sldChg chg="new del">
-        <pc:chgData name="Sreejith Rajan" userId="ec11bca0e4bee75f" providerId="LiveId" clId="{7CA8E155-B939-49A2-B258-5F667E7F83F2}" dt="2025-09-01T13:28:35.039" v="367" actId="47"/>
-        <pc:sldMkLst>
-          <pc:docMk/>
-          <pc:sldMk cId="1073535821" sldId="286"/>
-        </pc:sldMkLst>
-      </pc:sldChg>
       <pc:sldChg chg="delSp modSp add mod">
-        <pc:chgData name="Sreejith Rajan" userId="ec11bca0e4bee75f" providerId="LiveId" clId="{7CA8E155-B939-49A2-B258-5F667E7F83F2}" dt="2025-09-01T14:39:21.139" v="738"/>
-        <pc:sldMkLst>
-          <pc:docMk/>
-          <pc:sldMk cId="1488398723" sldId="286"/>
-        </pc:sldMkLst>
-      </pc:sldChg>
-      <pc:sldChg chg="new del">
-        <pc:chgData name="Sreejith Rajan" userId="ec11bca0e4bee75f" providerId="LiveId" clId="{7CA8E155-B939-49A2-B258-5F667E7F83F2}" dt="2025-09-01T13:28:42.025" v="369" actId="680"/>
-        <pc:sldMkLst>
-          <pc:docMk/>
-          <pc:sldMk cId="3982304584" sldId="286"/>
-        </pc:sldMkLst>
-      </pc:sldChg>
-    </pc:docChg>
-  </pc:docChgLst>
-  <pc:docChgLst>
-    <pc:chgData name="Sreejith Rajan" userId="ec11bca0e4bee75f" providerId="LiveId" clId="{7B4F392D-EAB3-4CE7-903E-F84869825F47}"/>
-    <pc:docChg chg="undo custSel addSld delSld modSld sldOrd">
-      <pc:chgData name="Sreejith Rajan" userId="ec11bca0e4bee75f" providerId="LiveId" clId="{7B4F392D-EAB3-4CE7-903E-F84869825F47}" dt="2025-09-30T02:20:00.308" v="853"/>
-      <pc:docMkLst>
-        <pc:docMk/>
-      </pc:docMkLst>
-      <pc:sldChg chg="modSp mod">
-        <pc:chgData name="Sreejith Rajan" userId="ec11bca0e4bee75f" providerId="LiveId" clId="{7B4F392D-EAB3-4CE7-903E-F84869825F47}" dt="2025-09-12T13:12:24.510" v="461" actId="20577"/>
-        <pc:sldMkLst>
-          <pc:docMk/>
-          <pc:sldMk cId="0" sldId="256"/>
-        </pc:sldMkLst>
-        <pc:spChg chg="mod">
-          <ac:chgData name="Sreejith Rajan" userId="ec11bca0e4bee75f" providerId="LiveId" clId="{7B4F392D-EAB3-4CE7-903E-F84869825F47}" dt="2025-09-12T13:12:24.510" v="461" actId="20577"/>
-          <ac:spMkLst>
-            <pc:docMk/>
-            <pc:sldMk cId="0" sldId="256"/>
-            <ac:spMk id="33" creationId="{00000000-0000-0000-0000-000000000000}"/>
-          </ac:spMkLst>
-        </pc:spChg>
-      </pc:sldChg>
-      <pc:sldChg chg="addSp modSp mod">
-        <pc:chgData name="Sreejith Rajan" userId="ec11bca0e4bee75f" providerId="LiveId" clId="{7B4F392D-EAB3-4CE7-903E-F84869825F47}" dt="2025-09-12T13:41:47.765" v="845" actId="1076"/>
-        <pc:sldMkLst>
-          <pc:docMk/>
-          <pc:sldMk cId="0" sldId="258"/>
-        </pc:sldMkLst>
-        <pc:spChg chg="mod">
-          <ac:chgData name="Sreejith Rajan" userId="ec11bca0e4bee75f" providerId="LiveId" clId="{7B4F392D-EAB3-4CE7-903E-F84869825F47}" dt="2025-09-12T13:41:19.620" v="842" actId="20577"/>
-          <ac:spMkLst>
-            <pc:docMk/>
-            <pc:sldMk cId="0" sldId="258"/>
-            <ac:spMk id="46" creationId="{00000000-0000-0000-0000-000000000000}"/>
-          </ac:spMkLst>
-        </pc:spChg>
-        <pc:spChg chg="mod">
-          <ac:chgData name="Sreejith Rajan" userId="ec11bca0e4bee75f" providerId="LiveId" clId="{7B4F392D-EAB3-4CE7-903E-F84869825F47}" dt="2025-09-12T13:19:51.598" v="482"/>
-          <ac:spMkLst>
-            <pc:docMk/>
-            <pc:sldMk cId="0" sldId="258"/>
-            <ac:spMk id="47" creationId="{00000000-0000-0000-0000-000000000000}"/>
-          </ac:spMkLst>
-        </pc:spChg>
-        <pc:picChg chg="add mod">
-          <ac:chgData name="Sreejith Rajan" userId="ec11bca0e4bee75f" providerId="LiveId" clId="{7B4F392D-EAB3-4CE7-903E-F84869825F47}" dt="2025-09-12T13:41:47.765" v="845" actId="1076"/>
-          <ac:picMkLst>
-            <pc:docMk/>
-            <pc:sldMk cId="0" sldId="258"/>
-            <ac:picMk id="3" creationId="{1AE76831-C66A-DFFC-DA86-79190C9A660B}"/>
-          </ac:picMkLst>
-        </pc:picChg>
-      </pc:sldChg>
-      <pc:sldChg chg="delSp modSp mod ord">
-        <pc:chgData name="Sreejith Rajan" userId="ec11bca0e4bee75f" providerId="LiveId" clId="{7B4F392D-EAB3-4CE7-903E-F84869825F47}" dt="2025-09-30T02:20:00.308" v="853"/>
-        <pc:sldMkLst>
-          <pc:docMk/>
-          <pc:sldMk cId="2768999598" sldId="285"/>
-        </pc:sldMkLst>
-        <pc:spChg chg="del mod">
-          <ac:chgData name="Sreejith Rajan" userId="ec11bca0e4bee75f" providerId="LiveId" clId="{7B4F392D-EAB3-4CE7-903E-F84869825F47}" dt="2025-09-30T02:20:00.307" v="851"/>
-          <ac:spMkLst>
-            <pc:docMk/>
-            <pc:sldMk cId="2768999598" sldId="285"/>
-            <ac:spMk id="6" creationId="{20F1C902-EA40-2049-5E0F-6877922BA01D}"/>
-          </ac:spMkLst>
-        </pc:spChg>
-        <pc:spChg chg="del mod">
-          <ac:chgData name="Sreejith Rajan" userId="ec11bca0e4bee75f" providerId="LiveId" clId="{7B4F392D-EAB3-4CE7-903E-F84869825F47}" dt="2025-09-30T02:20:00.308" v="853"/>
-          <ac:spMkLst>
-            <pc:docMk/>
-            <pc:sldMk cId="2768999598" sldId="285"/>
-            <ac:spMk id="7" creationId="{61EA9A41-0228-6B61-02CB-7BDC9E84AF59}"/>
-          </ac:spMkLst>
-        </pc:spChg>
-        <pc:spChg chg="mod">
-          <ac:chgData name="Sreejith Rajan" userId="ec11bca0e4bee75f" providerId="LiveId" clId="{7B4F392D-EAB3-4CE7-903E-F84869825F47}" dt="2025-09-12T13:28:16.447" v="748"/>
-          <ac:spMkLst>
-            <pc:docMk/>
-            <pc:sldMk cId="2768999598" sldId="285"/>
-            <ac:spMk id="54" creationId="{BD71BF94-80E9-B83A-06FD-F8B668F1F2F1}"/>
-          </ac:spMkLst>
-        </pc:spChg>
-        <pc:spChg chg="mod">
-          <ac:chgData name="Sreejith Rajan" userId="ec11bca0e4bee75f" providerId="LiveId" clId="{7B4F392D-EAB3-4CE7-903E-F84869825F47}" dt="2025-09-12T13:27:54.007" v="747" actId="20577"/>
-          <ac:spMkLst>
-            <pc:docMk/>
-            <pc:sldMk cId="2768999598" sldId="285"/>
-            <ac:spMk id="55" creationId="{6BEB0E42-D1CA-59A5-9488-2502CA7BE06C}"/>
-          </ac:spMkLst>
-        </pc:spChg>
-      </pc:sldChg>
-      <pc:sldChg chg="addSp delSp modSp del mod">
-        <pc:chgData name="Sreejith Rajan" userId="ec11bca0e4bee75f" providerId="LiveId" clId="{7B4F392D-EAB3-4CE7-903E-F84869825F47}" dt="2025-09-12T13:42:07.910" v="846" actId="47"/>
-        <pc:sldMkLst>
-          <pc:docMk/>
-          <pc:sldMk cId="1488398723" sldId="286"/>
-        </pc:sldMkLst>
-      </pc:sldChg>
-      <pc:sldChg chg="modSp add del mod ord">
-        <pc:chgData name="Sreejith Rajan" userId="ec11bca0e4bee75f" providerId="LiveId" clId="{7B4F392D-EAB3-4CE7-903E-F84869825F47}" dt="2025-09-12T13:42:10.819" v="847" actId="47"/>
-        <pc:sldMkLst>
-          <pc:docMk/>
-          <pc:sldMk cId="922807137" sldId="287"/>
-        </pc:sldMkLst>
-      </pc:sldChg>
-      <pc:sldChg chg="modSp del mod">
-        <pc:chgData name="Sreejith Rajan" userId="ec11bca0e4bee75f" providerId="LiveId" clId="{7B4F392D-EAB3-4CE7-903E-F84869825F47}" dt="2025-09-10T14:21:55.211" v="382" actId="47"/>
-        <pc:sldMkLst>
-          <pc:docMk/>
-          <pc:sldMk cId="1663749710" sldId="287"/>
-        </pc:sldMkLst>
-      </pc:sldChg>
-      <pc:sldChg chg="del">
-        <pc:chgData name="Sreejith Rajan" userId="ec11bca0e4bee75f" providerId="LiveId" clId="{7B4F392D-EAB3-4CE7-903E-F84869825F47}" dt="2025-09-10T14:21:57.545" v="383" actId="47"/>
-        <pc:sldMkLst>
-          <pc:docMk/>
-          <pc:sldMk cId="41759279" sldId="288"/>
-        </pc:sldMkLst>
-      </pc:sldChg>
-      <pc:sldChg chg="modSp add mod">
-        <pc:chgData name="Sreejith Rajan" userId="ec11bca0e4bee75f" providerId="LiveId" clId="{7B4F392D-EAB3-4CE7-903E-F84869825F47}" dt="2025-09-12T13:40:02.892" v="836" actId="313"/>
+        <pc:chgData name="Sreejith Rajan" userId="ec11bca0e4bee75f" providerId="LiveId" clId="{7B4F392D-EAB3-4CE7-903E-F84869825F47}" dt="2026-01-27T15:17:28.447" v="854" actId="478"/>
         <pc:sldMkLst>
           <pc:docMk/>
           <pc:sldMk cId="153392908" sldId="288"/>
         </pc:sldMkLst>
-        <pc:spChg chg="mod">
-          <ac:chgData name="Sreejith Rajan" userId="ec11bca0e4bee75f" providerId="LiveId" clId="{7B4F392D-EAB3-4CE7-903E-F84869825F47}" dt="2025-09-12T13:29:01.778" v="770" actId="20577"/>
+        <pc:spChg chg="del">
+          <ac:chgData name="Sreejith Rajan" userId="ec11bca0e4bee75f" providerId="LiveId" clId="{7B4F392D-EAB3-4CE7-903E-F84869825F47}" dt="2026-01-27T15:17:28.447" v="854" actId="478"/>
           <ac:spMkLst>
             <pc:docMk/>
             <pc:sldMk cId="153392908" sldId="288"/>
-            <ac:spMk id="54" creationId="{E74DDDE8-2724-3C41-C62E-A22913C36148}"/>
+            <ac:spMk id="6" creationId="{67C0E55C-356C-441F-4A8F-04BEF61FE52D}"/>
           </ac:spMkLst>
         </pc:spChg>
-        <pc:spChg chg="mod">
-          <ac:chgData name="Sreejith Rajan" userId="ec11bca0e4bee75f" providerId="LiveId" clId="{7B4F392D-EAB3-4CE7-903E-F84869825F47}" dt="2025-09-12T13:40:02.892" v="836" actId="313"/>
-          <ac:spMkLst>
-            <pc:docMk/>
-            <pc:sldMk cId="153392908" sldId="288"/>
-            <ac:spMk id="55" creationId="{E5DA9BB1-CEAD-00DD-BA7F-1B8F8BCD7377}"/>
-          </ac:spMkLst>
-        </pc:spChg>
-      </pc:sldChg>
-      <pc:sldChg chg="modSp del mod">
-        <pc:chgData name="Sreejith Rajan" userId="ec11bca0e4bee75f" providerId="LiveId" clId="{7B4F392D-EAB3-4CE7-903E-F84869825F47}" dt="2025-09-10T14:22:10.534" v="393" actId="47"/>
-        <pc:sldMkLst>
-          <pc:docMk/>
-          <pc:sldMk cId="3940705627" sldId="289"/>
-        </pc:sldMkLst>
-      </pc:sldChg>
-      <pc:sldChg chg="del">
-        <pc:chgData name="Sreejith Rajan" userId="ec11bca0e4bee75f" providerId="LiveId" clId="{7B4F392D-EAB3-4CE7-903E-F84869825F47}" dt="2025-09-10T14:22:13.030" v="394" actId="47"/>
-        <pc:sldMkLst>
-          <pc:docMk/>
-          <pc:sldMk cId="3880237196" sldId="290"/>
-        </pc:sldMkLst>
-      </pc:sldChg>
-      <pc:sldChg chg="new del">
-        <pc:chgData name="Sreejith Rajan" userId="ec11bca0e4bee75f" providerId="LiveId" clId="{7B4F392D-EAB3-4CE7-903E-F84869825F47}" dt="2025-09-10T14:16:53.318" v="373" actId="47"/>
-        <pc:sldMkLst>
-          <pc:docMk/>
-          <pc:sldMk cId="2193926655" sldId="291"/>
-        </pc:sldMkLst>
-      </pc:sldChg>
-    </pc:docChg>
-  </pc:docChgLst>
-  <pc:docChgLst>
-    <pc:chgData name="Sreejith Rajan" userId="ec11bca0e4bee75f" providerId="LiveId" clId="{38B55CF8-04A4-41BE-A5A9-C4EC65750160}"/>
-    <pc:docChg chg="undo custSel addSld delSld modSld">
-      <pc:chgData name="Sreejith Rajan" userId="ec11bca0e4bee75f" providerId="LiveId" clId="{38B55CF8-04A4-41BE-A5A9-C4EC65750160}" dt="2025-09-08T15:31:45.658" v="225" actId="20577"/>
-      <pc:docMkLst>
-        <pc:docMk/>
-      </pc:docMkLst>
-      <pc:sldChg chg="modSp mod">
-        <pc:chgData name="Sreejith Rajan" userId="ec11bca0e4bee75f" providerId="LiveId" clId="{38B55CF8-04A4-41BE-A5A9-C4EC65750160}" dt="2025-09-08T13:50:00.971" v="1" actId="20577"/>
-        <pc:sldMkLst>
-          <pc:docMk/>
-          <pc:sldMk cId="0" sldId="256"/>
-        </pc:sldMkLst>
-        <pc:spChg chg="mod">
-          <ac:chgData name="Sreejith Rajan" userId="ec11bca0e4bee75f" providerId="LiveId" clId="{38B55CF8-04A4-41BE-A5A9-C4EC65750160}" dt="2025-09-08T13:50:00.971" v="1" actId="20577"/>
-          <ac:spMkLst>
-            <pc:docMk/>
-            <pc:sldMk cId="0" sldId="256"/>
-            <ac:spMk id="33" creationId="{00000000-0000-0000-0000-000000000000}"/>
-          </ac:spMkLst>
-        </pc:spChg>
-      </pc:sldChg>
-      <pc:sldChg chg="del">
-        <pc:chgData name="Sreejith Rajan" userId="ec11bca0e4bee75f" providerId="LiveId" clId="{38B55CF8-04A4-41BE-A5A9-C4EC65750160}" dt="2025-09-08T13:50:29.832" v="4" actId="47"/>
-        <pc:sldMkLst>
-          <pc:docMk/>
-          <pc:sldMk cId="0" sldId="259"/>
-        </pc:sldMkLst>
-      </pc:sldChg>
-      <pc:sldChg chg="del">
-        <pc:chgData name="Sreejith Rajan" userId="ec11bca0e4bee75f" providerId="LiveId" clId="{38B55CF8-04A4-41BE-A5A9-C4EC65750160}" dt="2025-09-08T13:50:32.956" v="7" actId="47"/>
-        <pc:sldMkLst>
-          <pc:docMk/>
-          <pc:sldMk cId="1389626550" sldId="267"/>
-        </pc:sldMkLst>
-      </pc:sldChg>
-      <pc:sldChg chg="del">
-        <pc:chgData name="Sreejith Rajan" userId="ec11bca0e4bee75f" providerId="LiveId" clId="{38B55CF8-04A4-41BE-A5A9-C4EC65750160}" dt="2025-09-08T13:50:30.637" v="5" actId="47"/>
-        <pc:sldMkLst>
-          <pc:docMk/>
-          <pc:sldMk cId="280470215" sldId="281"/>
-        </pc:sldMkLst>
-      </pc:sldChg>
-      <pc:sldChg chg="del">
-        <pc:chgData name="Sreejith Rajan" userId="ec11bca0e4bee75f" providerId="LiveId" clId="{38B55CF8-04A4-41BE-A5A9-C4EC65750160}" dt="2025-09-08T13:50:31.500" v="6" actId="47"/>
-        <pc:sldMkLst>
-          <pc:docMk/>
-          <pc:sldMk cId="682396941" sldId="282"/>
-        </pc:sldMkLst>
-      </pc:sldChg>
-      <pc:sldChg chg="del">
-        <pc:chgData name="Sreejith Rajan" userId="ec11bca0e4bee75f" providerId="LiveId" clId="{38B55CF8-04A4-41BE-A5A9-C4EC65750160}" dt="2025-09-08T13:50:21.633" v="3" actId="47"/>
-        <pc:sldMkLst>
-          <pc:docMk/>
-          <pc:sldMk cId="3362503428" sldId="283"/>
-        </pc:sldMkLst>
-      </pc:sldChg>
-      <pc:sldChg chg="del">
-        <pc:chgData name="Sreejith Rajan" userId="ec11bca0e4bee75f" providerId="LiveId" clId="{38B55CF8-04A4-41BE-A5A9-C4EC65750160}" dt="2025-09-08T13:50:19.202" v="2" actId="47"/>
-        <pc:sldMkLst>
-          <pc:docMk/>
-          <pc:sldMk cId="3896615428" sldId="284"/>
-        </pc:sldMkLst>
-      </pc:sldChg>
-      <pc:sldChg chg="modSp add mod">
-        <pc:chgData name="Sreejith Rajan" userId="ec11bca0e4bee75f" providerId="LiveId" clId="{38B55CF8-04A4-41BE-A5A9-C4EC65750160}" dt="2025-09-08T13:59:59.014" v="33" actId="207"/>
-        <pc:sldMkLst>
-          <pc:docMk/>
-          <pc:sldMk cId="1663749710" sldId="287"/>
-        </pc:sldMkLst>
-      </pc:sldChg>
-      <pc:sldChg chg="addSp modSp add mod">
-        <pc:chgData name="Sreejith Rajan" userId="ec11bca0e4bee75f" providerId="LiveId" clId="{38B55CF8-04A4-41BE-A5A9-C4EC65750160}" dt="2025-09-08T14:04:15.571" v="122" actId="207"/>
-        <pc:sldMkLst>
-          <pc:docMk/>
-          <pc:sldMk cId="41759279" sldId="288"/>
-        </pc:sldMkLst>
-      </pc:sldChg>
-      <pc:sldChg chg="new del">
-        <pc:chgData name="Sreejith Rajan" userId="ec11bca0e4bee75f" providerId="LiveId" clId="{38B55CF8-04A4-41BE-A5A9-C4EC65750160}" dt="2025-09-08T14:10:52.179" v="124" actId="680"/>
-        <pc:sldMkLst>
-          <pc:docMk/>
-          <pc:sldMk cId="3146899580" sldId="289"/>
-        </pc:sldMkLst>
-      </pc:sldChg>
-      <pc:sldChg chg="delSp modSp add mod">
-        <pc:chgData name="Sreejith Rajan" userId="ec11bca0e4bee75f" providerId="LiveId" clId="{38B55CF8-04A4-41BE-A5A9-C4EC65750160}" dt="2025-09-08T14:12:01.449" v="193" actId="207"/>
-        <pc:sldMkLst>
-          <pc:docMk/>
-          <pc:sldMk cId="3940705627" sldId="289"/>
-        </pc:sldMkLst>
-      </pc:sldChg>
-      <pc:sldChg chg="addSp delSp modSp new mod">
-        <pc:chgData name="Sreejith Rajan" userId="ec11bca0e4bee75f" providerId="LiveId" clId="{38B55CF8-04A4-41BE-A5A9-C4EC65750160}" dt="2025-09-08T15:31:45.658" v="225" actId="20577"/>
-        <pc:sldMkLst>
-          <pc:docMk/>
-          <pc:sldMk cId="3880237196" sldId="290"/>
-        </pc:sldMkLst>
       </pc:sldChg>
     </pc:docChg>
   </pc:docChgLst>
@@ -5358,41 +4983,6 @@
       </p:sp>
       <p:sp>
         <p:nvSpPr>
-          <p:cNvPr id="6" name="TextBox 5">
-            <a:extLst>
-              <a:ext uri="{FF2B5EF4-FFF2-40B4-BE49-F238E27FC236}">
-                <a16:creationId xmlns:a16="http://schemas.microsoft.com/office/drawing/2014/main" id="{67C0E55C-356C-441F-4A8F-04BEF61FE52D}"/>
-              </a:ext>
-            </a:extLst>
-          </p:cNvPr>
-          <p:cNvSpPr txBox="1"/>
-          <p:nvPr/>
-        </p:nvSpPr>
-        <p:spPr>
-          <a:xfrm>
-            <a:off x="4379174" y="1814287"/>
-            <a:ext cx="284052" cy="307777"/>
-          </a:xfrm>
-          <a:prstGeom prst="rect">
-            <a:avLst/>
-          </a:prstGeom>
-          <a:noFill/>
-        </p:spPr>
-        <p:txBody>
-          <a:bodyPr wrap="none" rtlCol="0">
-            <a:spAutoFit/>
-          </a:bodyPr>
-          <a:lstStyle/>
-          <a:p>
-            <a:r>
-              <a:rPr lang="en-IN" dirty="0"/>
-              <a:t>0</a:t>
-            </a:r>
-          </a:p>
-        </p:txBody>
-      </p:sp>
-      <p:sp>
-        <p:nvSpPr>
           <p:cNvPr id="7" name="TextBox 6">
             <a:extLst>
               <a:ext uri="{FF2B5EF4-FFF2-40B4-BE49-F238E27FC236}">
